--- a/Final-Defense-blackgram-leaf-4782.pptx
+++ b/Final-Defense-blackgram-leaf-4782.pptx
@@ -5,7 +5,7 @@
     <p:sldMasterId id="2147483659" r:id="rId1"/>
   </p:sldMasterIdLst>
   <p:notesMasterIdLst>
-    <p:notesMasterId r:id="rId22"/>
+    <p:notesMasterId r:id="rId23"/>
   </p:notesMasterIdLst>
   <p:sldIdLst>
     <p:sldId id="256" r:id="rId2"/>
@@ -24,10 +24,11 @@
     <p:sldId id="311" r:id="rId15"/>
     <p:sldId id="300" r:id="rId16"/>
     <p:sldId id="305" r:id="rId17"/>
-    <p:sldId id="307" r:id="rId18"/>
-    <p:sldId id="291" r:id="rId19"/>
-    <p:sldId id="299" r:id="rId20"/>
-    <p:sldId id="295" r:id="rId21"/>
+    <p:sldId id="304" r:id="rId18"/>
+    <p:sldId id="307" r:id="rId19"/>
+    <p:sldId id="291" r:id="rId20"/>
+    <p:sldId id="299" r:id="rId21"/>
+    <p:sldId id="295" r:id="rId22"/>
   </p:sldIdLst>
   <p:sldSz cx="12192000" cy="6858000"/>
   <p:notesSz cx="6858000" cy="9144000"/>
@@ -9161,6 +9162,196 @@
         <p:cNvPr id="1" name="">
           <a:extLst>
             <a:ext uri="{FF2B5EF4-FFF2-40B4-BE49-F238E27FC236}">
+              <a16:creationId xmlns:a16="http://schemas.microsoft.com/office/drawing/2014/main" id="{13DDEE64-196C-B3D9-C82D-1C952ED4B751}"/>
+            </a:ext>
+          </a:extLst>
+        </p:cNvPr>
+        <p:cNvGrpSpPr/>
+        <p:nvPr/>
+      </p:nvGrpSpPr>
+      <p:grpSpPr>
+        <a:xfrm>
+          <a:off x="0" y="0"/>
+          <a:ext cx="0" cy="0"/>
+          <a:chOff x="0" y="0"/>
+          <a:chExt cx="0" cy="0"/>
+        </a:xfrm>
+      </p:grpSpPr>
+      <p:sp>
+        <p:nvSpPr>
+          <p:cNvPr id="2" name="Title 1">
+            <a:extLst>
+              <a:ext uri="{FF2B5EF4-FFF2-40B4-BE49-F238E27FC236}">
+                <a16:creationId xmlns:a16="http://schemas.microsoft.com/office/drawing/2014/main" id="{8DF13532-2D31-B35B-51FC-878A3DDEBA0F}"/>
+              </a:ext>
+            </a:extLst>
+          </p:cNvPr>
+          <p:cNvSpPr>
+            <a:spLocks noGrp="1"/>
+          </p:cNvSpPr>
+          <p:nvPr>
+            <p:ph type="title"/>
+          </p:nvPr>
+        </p:nvSpPr>
+        <p:spPr>
+          <a:xfrm>
+            <a:off x="1371600" y="160908"/>
+            <a:ext cx="9448800" cy="868362"/>
+          </a:xfrm>
+        </p:spPr>
+        <p:txBody>
+          <a:bodyPr>
+            <a:normAutofit/>
+          </a:bodyPr>
+          <a:lstStyle/>
+          <a:p>
+            <a:r>
+              <a:rPr lang="en-US" dirty="0">
+                <a:solidFill>
+                  <a:srgbClr val="7030A0"/>
+                </a:solidFill>
+                <a:latin typeface="Times New Roman" pitchFamily="18" charset="0"/>
+                <a:cs typeface="Times New Roman" pitchFamily="18" charset="0"/>
+              </a:rPr>
+              <a:t>Sample dataset and Expected output</a:t>
+            </a:r>
+          </a:p>
+        </p:txBody>
+      </p:sp>
+      <p:sp>
+        <p:nvSpPr>
+          <p:cNvPr id="4" name="Slide Number Placeholder 3">
+            <a:extLst>
+              <a:ext uri="{FF2B5EF4-FFF2-40B4-BE49-F238E27FC236}">
+                <a16:creationId xmlns:a16="http://schemas.microsoft.com/office/drawing/2014/main" id="{62D4510A-2A45-948C-55F1-C16B1F9D97CD}"/>
+              </a:ext>
+            </a:extLst>
+          </p:cNvPr>
+          <p:cNvSpPr>
+            <a:spLocks noGrp="1"/>
+          </p:cNvSpPr>
+          <p:nvPr>
+            <p:ph type="sldNum" sz="quarter" idx="16"/>
+          </p:nvPr>
+        </p:nvSpPr>
+        <p:spPr>
+          <a:xfrm>
+            <a:off x="9347200" y="5961645"/>
+            <a:ext cx="2844800" cy="365125"/>
+          </a:xfrm>
+        </p:spPr>
+        <p:txBody>
+          <a:bodyPr/>
+          <a:lstStyle/>
+          <a:p>
+            <a:pPr>
+              <a:defRPr/>
+            </a:pPr>
+            <a:fld id="{4CD333A3-7515-47B8-9EDC-EE0892D9C861}" type="slidenum">
+              <a:rPr lang="en-US" smtClean="0"/>
+              <a:pPr>
+                <a:defRPr/>
+              </a:pPr>
+              <a:t>17</a:t>
+            </a:fld>
+            <a:endParaRPr lang="en-US" dirty="0"/>
+          </a:p>
+        </p:txBody>
+      </p:sp>
+      <p:sp>
+        <p:nvSpPr>
+          <p:cNvPr id="3" name="TextBox 2">
+            <a:extLst>
+              <a:ext uri="{FF2B5EF4-FFF2-40B4-BE49-F238E27FC236}">
+                <a16:creationId xmlns:a16="http://schemas.microsoft.com/office/drawing/2014/main" id="{354740A8-B4CC-FE80-9727-34DB4B177478}"/>
+              </a:ext>
+            </a:extLst>
+          </p:cNvPr>
+          <p:cNvSpPr txBox="1"/>
+          <p:nvPr/>
+        </p:nvSpPr>
+        <p:spPr>
+          <a:xfrm>
+            <a:off x="8915400" y="6412468"/>
+            <a:ext cx="3276600" cy="369332"/>
+          </a:xfrm>
+          <a:prstGeom prst="rect">
+            <a:avLst/>
+          </a:prstGeom>
+          <a:solidFill>
+            <a:srgbClr val="4F81BD"/>
+          </a:solidFill>
+        </p:spPr>
+        <p:txBody>
+          <a:bodyPr wrap="square" rtlCol="0">
+            <a:spAutoFit/>
+          </a:bodyPr>
+          <a:lstStyle/>
+          <a:p>
+            <a:pPr algn="r"/>
+            <a:r>
+              <a:rPr lang="en-US" b="1" dirty="0">
+                <a:solidFill>
+                  <a:schemeClr val="bg1"/>
+                </a:solidFill>
+              </a:rPr>
+              <a:t>B.Sc. Final-Defense</a:t>
+            </a:r>
+          </a:p>
+        </p:txBody>
+      </p:sp>
+      <p:pic>
+        <p:nvPicPr>
+          <p:cNvPr id="5" name="Picture 4">
+            <a:extLst>
+              <a:ext uri="{FF2B5EF4-FFF2-40B4-BE49-F238E27FC236}">
+                <a16:creationId xmlns:a16="http://schemas.microsoft.com/office/drawing/2014/main" id="{F1CAD1C9-A256-CC71-C327-20909F289A91}"/>
+              </a:ext>
+            </a:extLst>
+          </p:cNvPr>
+          <p:cNvPicPr>
+            <a:picLocks noChangeAspect="1"/>
+          </p:cNvPicPr>
+          <p:nvPr/>
+        </p:nvPicPr>
+        <p:blipFill>
+          <a:blip r:embed="rId2"/>
+          <a:stretch>
+            <a:fillRect/>
+          </a:stretch>
+        </p:blipFill>
+        <p:spPr bwMode="auto">
+          <a:xfrm>
+            <a:off x="1905000" y="937023"/>
+            <a:ext cx="8153400" cy="5127721"/>
+          </a:xfrm>
+          <a:prstGeom prst="rect">
+            <a:avLst/>
+          </a:prstGeom>
+          <a:noFill/>
+        </p:spPr>
+      </p:pic>
+    </p:spTree>
+    <p:extLst>
+      <p:ext uri="{BB962C8B-B14F-4D97-AF65-F5344CB8AC3E}">
+        <p14:creationId xmlns:p14="http://schemas.microsoft.com/office/powerpoint/2010/main" val="2592470236"/>
+      </p:ext>
+    </p:extLst>
+  </p:cSld>
+  <p:clrMapOvr>
+    <a:masterClrMapping/>
+  </p:clrMapOvr>
+</p:sld>
+</file>
+
+<file path=ppt/slides/slide18.xml><?xml version="1.0" encoding="utf-8"?>
+<p:sld xmlns:a="http://schemas.openxmlformats.org/drawingml/2006/main" xmlns:r="http://schemas.openxmlformats.org/officeDocument/2006/relationships" xmlns:p="http://schemas.openxmlformats.org/presentationml/2006/main">
+  <p:cSld>
+    <p:spTree>
+      <p:nvGrpSpPr>
+        <p:cNvPr id="1" name="">
+          <a:extLst>
+            <a:ext uri="{FF2B5EF4-FFF2-40B4-BE49-F238E27FC236}">
               <a16:creationId xmlns:a16="http://schemas.microsoft.com/office/drawing/2014/main" id="{39AACCF1-4663-0FAC-E557-C8C860184D62}"/>
             </a:ext>
           </a:extLst>
@@ -9256,7 +9447,7 @@
               <a:pPr>
                 <a:defRPr/>
               </a:pPr>
-              <a:t>17</a:t>
+              <a:t>18</a:t>
             </a:fld>
             <a:endParaRPr lang="en-US" dirty="0"/>
           </a:p>
@@ -9373,7 +9564,7 @@
 </p:sld>
 </file>
 
-<file path=ppt/slides/slide18.xml><?xml version="1.0" encoding="utf-8"?>
+<file path=ppt/slides/slide19.xml><?xml version="1.0" encoding="utf-8"?>
 <p:sld xmlns:a="http://schemas.openxmlformats.org/drawingml/2006/main" xmlns:r="http://schemas.openxmlformats.org/officeDocument/2006/relationships" xmlns:p="http://schemas.openxmlformats.org/presentationml/2006/main">
   <p:cSld>
     <p:spTree>
@@ -9456,7 +9647,7 @@
               <a:pPr>
                 <a:defRPr/>
               </a:pPr>
-              <a:t>18</a:t>
+              <a:t>19</a:t>
             </a:fld>
             <a:endParaRPr lang="en-US" dirty="0"/>
           </a:p>
@@ -9825,715 +10016,6 @@
     <p:extLst>
       <p:ext uri="{BB962C8B-B14F-4D97-AF65-F5344CB8AC3E}">
         <p14:creationId xmlns:p14="http://schemas.microsoft.com/office/powerpoint/2010/main" val="2873705979"/>
-      </p:ext>
-    </p:extLst>
-  </p:cSld>
-  <p:clrMapOvr>
-    <a:masterClrMapping/>
-  </p:clrMapOvr>
-</p:sld>
-</file>
-
-<file path=ppt/slides/slide19.xml><?xml version="1.0" encoding="utf-8"?>
-<p:sld xmlns:a="http://schemas.openxmlformats.org/drawingml/2006/main" xmlns:r="http://schemas.openxmlformats.org/officeDocument/2006/relationships" xmlns:p="http://schemas.openxmlformats.org/presentationml/2006/main">
-  <p:cSld>
-    <p:spTree>
-      <p:nvGrpSpPr>
-        <p:cNvPr id="1" name="">
-          <a:extLst>
-            <a:ext uri="{FF2B5EF4-FFF2-40B4-BE49-F238E27FC236}">
-              <a16:creationId xmlns:a16="http://schemas.microsoft.com/office/drawing/2014/main" id="{A59BAAE9-3B4C-FCEC-50FC-12FB4062A64C}"/>
-            </a:ext>
-          </a:extLst>
-        </p:cNvPr>
-        <p:cNvGrpSpPr/>
-        <p:nvPr/>
-      </p:nvGrpSpPr>
-      <p:grpSpPr>
-        <a:xfrm>
-          <a:off x="0" y="0"/>
-          <a:ext cx="0" cy="0"/>
-          <a:chOff x="0" y="0"/>
-          <a:chExt cx="0" cy="0"/>
-        </a:xfrm>
-      </p:grpSpPr>
-      <p:sp>
-        <p:nvSpPr>
-          <p:cNvPr id="2" name="Title 1">
-            <a:extLst>
-              <a:ext uri="{FF2B5EF4-FFF2-40B4-BE49-F238E27FC236}">
-                <a16:creationId xmlns:a16="http://schemas.microsoft.com/office/drawing/2014/main" id="{9801CA16-AE0D-D369-FE42-59C7313CB16E}"/>
-              </a:ext>
-            </a:extLst>
-          </p:cNvPr>
-          <p:cNvSpPr>
-            <a:spLocks noGrp="1"/>
-          </p:cNvSpPr>
-          <p:nvPr>
-            <p:ph type="title"/>
-          </p:nvPr>
-        </p:nvSpPr>
-        <p:spPr>
-          <a:xfrm>
-            <a:off x="1981200" y="274638"/>
-            <a:ext cx="8229600" cy="868362"/>
-          </a:xfrm>
-        </p:spPr>
-        <p:txBody>
-          <a:bodyPr/>
-          <a:lstStyle/>
-          <a:p>
-            <a:r>
-              <a:rPr lang="en-US" dirty="0">
-                <a:solidFill>
-                  <a:srgbClr val="7030A0"/>
-                </a:solidFill>
-                <a:latin typeface="Times New Roman" pitchFamily="18" charset="0"/>
-                <a:cs typeface="Times New Roman" pitchFamily="18" charset="0"/>
-              </a:rPr>
-              <a:t>References</a:t>
-            </a:r>
-            <a:endParaRPr lang="en-US" dirty="0">
-              <a:solidFill>
-                <a:srgbClr val="7030A0"/>
-              </a:solidFill>
-            </a:endParaRPr>
-          </a:p>
-        </p:txBody>
-      </p:sp>
-      <p:sp>
-        <p:nvSpPr>
-          <p:cNvPr id="4" name="Slide Number Placeholder 3">
-            <a:extLst>
-              <a:ext uri="{FF2B5EF4-FFF2-40B4-BE49-F238E27FC236}">
-                <a16:creationId xmlns:a16="http://schemas.microsoft.com/office/drawing/2014/main" id="{F97097F1-FADA-324C-E90E-73FFCAEF9034}"/>
-              </a:ext>
-            </a:extLst>
-          </p:cNvPr>
-          <p:cNvSpPr>
-            <a:spLocks noGrp="1"/>
-          </p:cNvSpPr>
-          <p:nvPr>
-            <p:ph type="sldNum" sz="quarter" idx="16"/>
-          </p:nvPr>
-        </p:nvSpPr>
-        <p:spPr>
-          <a:xfrm>
-            <a:off x="9347200" y="5959475"/>
-            <a:ext cx="2844800" cy="365125"/>
-          </a:xfrm>
-        </p:spPr>
-        <p:txBody>
-          <a:bodyPr/>
-          <a:lstStyle/>
-          <a:p>
-            <a:pPr>
-              <a:defRPr/>
-            </a:pPr>
-            <a:fld id="{4CD333A3-7515-47B8-9EDC-EE0892D9C861}" type="slidenum">
-              <a:rPr lang="en-US" smtClean="0"/>
-              <a:pPr>
-                <a:defRPr/>
-              </a:pPr>
-              <a:t>19</a:t>
-            </a:fld>
-            <a:endParaRPr lang="en-US" dirty="0"/>
-          </a:p>
-        </p:txBody>
-      </p:sp>
-      <p:sp>
-        <p:nvSpPr>
-          <p:cNvPr id="5" name="TextBox 4">
-            <a:extLst>
-              <a:ext uri="{FF2B5EF4-FFF2-40B4-BE49-F238E27FC236}">
-                <a16:creationId xmlns:a16="http://schemas.microsoft.com/office/drawing/2014/main" id="{908FB2A1-531C-6EF4-8574-EB5912211BF6}"/>
-              </a:ext>
-            </a:extLst>
-          </p:cNvPr>
-          <p:cNvSpPr txBox="1"/>
-          <p:nvPr/>
-        </p:nvSpPr>
-        <p:spPr>
-          <a:xfrm>
-            <a:off x="8915400" y="6412468"/>
-            <a:ext cx="3276600" cy="369332"/>
-          </a:xfrm>
-          <a:prstGeom prst="rect">
-            <a:avLst/>
-          </a:prstGeom>
-          <a:solidFill>
-            <a:srgbClr val="4F81BD"/>
-          </a:solidFill>
-        </p:spPr>
-        <p:txBody>
-          <a:bodyPr wrap="square" rtlCol="0">
-            <a:spAutoFit/>
-          </a:bodyPr>
-          <a:lstStyle/>
-          <a:p>
-            <a:pPr algn="r"/>
-            <a:r>
-              <a:rPr lang="en-US" b="1" dirty="0">
-                <a:solidFill>
-                  <a:schemeClr val="bg1"/>
-                </a:solidFill>
-              </a:rPr>
-              <a:t>B.Sc. Final-Defense</a:t>
-            </a:r>
-          </a:p>
-        </p:txBody>
-      </p:sp>
-      <p:sp>
-        <p:nvSpPr>
-          <p:cNvPr id="3" name="Content Placeholder 2">
-            <a:extLst>
-              <a:ext uri="{FF2B5EF4-FFF2-40B4-BE49-F238E27FC236}">
-                <a16:creationId xmlns:a16="http://schemas.microsoft.com/office/drawing/2014/main" id="{77D4754E-D10E-F191-5198-2CFE71EB669C}"/>
-              </a:ext>
-            </a:extLst>
-          </p:cNvPr>
-          <p:cNvSpPr>
-            <a:spLocks noGrp="1"/>
-          </p:cNvSpPr>
-          <p:nvPr>
-            <p:ph sz="quarter" idx="13"/>
-          </p:nvPr>
-        </p:nvSpPr>
-        <p:spPr bwMode="auto">
-          <a:xfrm>
-            <a:off x="533400" y="1676400"/>
-            <a:ext cx="11049000" cy="3962400"/>
-          </a:xfrm>
-        </p:spPr>
-        <p:txBody>
-          <a:bodyPr vertOverflow="overflow" horzOverflow="overflow" vert="horz" wrap="square" lIns="91440" tIns="45720" rIns="91440" bIns="45720" numCol="1" spcCol="0" rtlCol="0" fromWordArt="0" anchor="t" anchorCtr="0" forceAA="0" compatLnSpc="0">
-            <a:normAutofit fontScale="80000" lnSpcReduction="10000"/>
-          </a:bodyPr>
-          <a:lstStyle/>
-          <a:p>
-            <a:pPr marL="342900" marR="0" lvl="0" indent="-342900" algn="just">
-              <a:lnSpc>
-                <a:spcPct val="150000"/>
-              </a:lnSpc>
-              <a:spcBef>
-                <a:spcPts val="5"/>
-              </a:spcBef>
-              <a:spcAft>
-                <a:spcPts val="0"/>
-              </a:spcAft>
-              <a:buFont typeface="+mj-lt"/>
-              <a:buAutoNum type="arabicPeriod"/>
-              <a:tabLst>
-                <a:tab pos="342900" algn="l"/>
-              </a:tabLst>
-              <a:defRPr/>
-            </a:pPr>
-            <a:r>
-              <a:rPr lang="en-US" sz="1800" dirty="0">
-                <a:solidFill>
-                  <a:srgbClr val="000000"/>
-                </a:solidFill>
-                <a:latin typeface="Times New Roman"/>
-                <a:ea typeface="Century"/>
-                <a:cs typeface="Times New Roman"/>
-              </a:rPr>
-              <a:t>N. </a:t>
-            </a:r>
-            <a:r>
-              <a:rPr lang="en-US" sz="1800" dirty="0" err="1">
-                <a:solidFill>
-                  <a:srgbClr val="000000"/>
-                </a:solidFill>
-                <a:latin typeface="Times New Roman"/>
-                <a:ea typeface="Century"/>
-                <a:cs typeface="Times New Roman"/>
-              </a:rPr>
-              <a:t>Hajare</a:t>
-            </a:r>
-            <a:r>
-              <a:rPr lang="en-US" sz="1800" dirty="0">
-                <a:solidFill>
-                  <a:srgbClr val="000000"/>
-                </a:solidFill>
-                <a:latin typeface="Times New Roman"/>
-                <a:ea typeface="Century"/>
-                <a:cs typeface="Times New Roman"/>
-              </a:rPr>
-              <a:t> and A. S. </a:t>
-            </a:r>
-            <a:r>
-              <a:rPr lang="en-US" sz="1800" dirty="0" err="1">
-                <a:solidFill>
-                  <a:srgbClr val="000000"/>
-                </a:solidFill>
-                <a:latin typeface="Times New Roman"/>
-                <a:ea typeface="Century"/>
-                <a:cs typeface="Times New Roman"/>
-              </a:rPr>
-              <a:t>Rajawat</a:t>
-            </a:r>
-            <a:r>
-              <a:rPr lang="en-US" sz="1800" dirty="0">
-                <a:solidFill>
-                  <a:srgbClr val="000000"/>
-                </a:solidFill>
-                <a:latin typeface="Times New Roman"/>
-                <a:ea typeface="Century"/>
-                <a:cs typeface="Times New Roman"/>
-              </a:rPr>
-              <a:t>, "Black gram disease classification via deep ensemble model with optimal training," </a:t>
-            </a:r>
-            <a:r>
-              <a:rPr lang="en-US" sz="1800" i="1" dirty="0">
-                <a:solidFill>
-                  <a:srgbClr val="000000"/>
-                </a:solidFill>
-                <a:latin typeface="Times New Roman"/>
-                <a:ea typeface="Century"/>
-                <a:cs typeface="Times New Roman"/>
-              </a:rPr>
-              <a:t>International Journal of Image and Graphics</a:t>
-            </a:r>
-            <a:r>
-              <a:rPr lang="en-US" sz="1800" dirty="0">
-                <a:solidFill>
-                  <a:srgbClr val="000000"/>
-                </a:solidFill>
-                <a:latin typeface="Times New Roman"/>
-                <a:ea typeface="Century"/>
-                <a:cs typeface="Times New Roman"/>
-              </a:rPr>
-              <a:t>, vol. 25, no. 04, p. 2550033, 2025.</a:t>
-            </a:r>
-            <a:endParaRPr lang="en-US" sz="1800" dirty="0">
-              <a:latin typeface="Times New Roman"/>
-              <a:ea typeface="Calibri"/>
-              <a:cs typeface="Times New Roman"/>
-            </a:endParaRPr>
-          </a:p>
-          <a:p>
-            <a:pPr marL="342900" marR="0" lvl="0" indent="-342900" algn="just">
-              <a:lnSpc>
-                <a:spcPct val="150000"/>
-              </a:lnSpc>
-              <a:spcBef>
-                <a:spcPts val="5"/>
-              </a:spcBef>
-              <a:spcAft>
-                <a:spcPts val="0"/>
-              </a:spcAft>
-              <a:buFont typeface="+mj-lt"/>
-              <a:buAutoNum type="arabicPeriod"/>
-              <a:tabLst>
-                <a:tab pos="342900" algn="l"/>
-              </a:tabLst>
-              <a:defRPr/>
-            </a:pPr>
-            <a:r>
-              <a:rPr lang="en-US" sz="1800" dirty="0">
-                <a:solidFill>
-                  <a:srgbClr val="000000"/>
-                </a:solidFill>
-                <a:latin typeface="Times New Roman"/>
-                <a:ea typeface="Century"/>
-                <a:cs typeface="Times New Roman"/>
-              </a:rPr>
-              <a:t>N. S. Jyothi and R. S. Prasad, "</a:t>
-            </a:r>
-            <a:r>
-              <a:rPr lang="en-US" sz="1800" dirty="0" err="1">
-                <a:solidFill>
-                  <a:srgbClr val="000000"/>
-                </a:solidFill>
-                <a:latin typeface="Times New Roman"/>
-                <a:ea typeface="Century"/>
-                <a:cs typeface="Times New Roman"/>
-              </a:rPr>
-              <a:t>Cuscuta</a:t>
-            </a:r>
-            <a:r>
-              <a:rPr lang="en-US" sz="1800" dirty="0">
-                <a:solidFill>
-                  <a:srgbClr val="000000"/>
-                </a:solidFill>
-                <a:latin typeface="Times New Roman"/>
-                <a:ea typeface="Century"/>
-                <a:cs typeface="Times New Roman"/>
-              </a:rPr>
-              <a:t> detection and classification of </a:t>
-            </a:r>
-            <a:r>
-              <a:rPr lang="en-US" sz="1800" dirty="0" err="1">
-                <a:solidFill>
-                  <a:srgbClr val="000000"/>
-                </a:solidFill>
-                <a:latin typeface="Times New Roman"/>
-                <a:ea typeface="Century"/>
-                <a:cs typeface="Times New Roman"/>
-              </a:rPr>
-              <a:t>blackgram</a:t>
-            </a:r>
-            <a:r>
-              <a:rPr lang="en-US" sz="1800" dirty="0">
-                <a:solidFill>
-                  <a:srgbClr val="000000"/>
-                </a:solidFill>
-                <a:latin typeface="Times New Roman"/>
-                <a:ea typeface="Century"/>
-                <a:cs typeface="Times New Roman"/>
-              </a:rPr>
-              <a:t> plant leaf diseases using deep-transformation algorithm," in </a:t>
-            </a:r>
-            <a:r>
-              <a:rPr lang="en-US" sz="1800" i="1" dirty="0">
-                <a:solidFill>
-                  <a:srgbClr val="000000"/>
-                </a:solidFill>
-                <a:latin typeface="Times New Roman"/>
-                <a:ea typeface="Century"/>
-                <a:cs typeface="Times New Roman"/>
-              </a:rPr>
-              <a:t>2025 International Conference on Multi-Agent Systems for Collaborative Intelligence (ICMSCI)</a:t>
-            </a:r>
-            <a:r>
-              <a:rPr lang="en-US" sz="1800" dirty="0">
-                <a:solidFill>
-                  <a:srgbClr val="000000"/>
-                </a:solidFill>
-                <a:latin typeface="Times New Roman"/>
-                <a:ea typeface="Century"/>
-                <a:cs typeface="Times New Roman"/>
-              </a:rPr>
-              <a:t>, Jan. 2025, pp. 1854–1858.</a:t>
-            </a:r>
-            <a:endParaRPr lang="en-US" sz="1800" dirty="0">
-              <a:latin typeface="Times New Roman"/>
-              <a:ea typeface="Calibri"/>
-              <a:cs typeface="Times New Roman"/>
-            </a:endParaRPr>
-          </a:p>
-          <a:p>
-            <a:pPr marL="342900" marR="0" lvl="0" indent="-342900" algn="just">
-              <a:lnSpc>
-                <a:spcPct val="150000"/>
-              </a:lnSpc>
-              <a:spcBef>
-                <a:spcPts val="5"/>
-              </a:spcBef>
-              <a:spcAft>
-                <a:spcPts val="0"/>
-              </a:spcAft>
-              <a:buFont typeface="+mj-lt"/>
-              <a:buAutoNum type="arabicPeriod"/>
-              <a:tabLst>
-                <a:tab pos="342900" algn="l"/>
-              </a:tabLst>
-              <a:defRPr/>
-            </a:pPr>
-            <a:r>
-              <a:rPr lang="en-US" sz="1800" dirty="0">
-                <a:solidFill>
-                  <a:srgbClr val="000000"/>
-                </a:solidFill>
-                <a:latin typeface="Times New Roman"/>
-                <a:ea typeface="Century"/>
-                <a:cs typeface="Times New Roman"/>
-              </a:rPr>
-              <a:t>S. </a:t>
-            </a:r>
-            <a:r>
-              <a:rPr lang="en-US" sz="1800" dirty="0" err="1">
-                <a:solidFill>
-                  <a:srgbClr val="000000"/>
-                </a:solidFill>
-                <a:latin typeface="Times New Roman"/>
-                <a:ea typeface="Century"/>
-                <a:cs typeface="Times New Roman"/>
-              </a:rPr>
-              <a:t>Talasila</a:t>
-            </a:r>
-            <a:r>
-              <a:rPr lang="en-US" sz="1800" dirty="0">
-                <a:solidFill>
-                  <a:srgbClr val="000000"/>
-                </a:solidFill>
-                <a:latin typeface="Times New Roman"/>
-                <a:ea typeface="Century"/>
-                <a:cs typeface="Times New Roman"/>
-              </a:rPr>
-              <a:t>, V. K. </a:t>
-            </a:r>
-            <a:r>
-              <a:rPr lang="en-US" sz="1800" dirty="0" err="1">
-                <a:solidFill>
-                  <a:srgbClr val="000000"/>
-                </a:solidFill>
-                <a:latin typeface="Times New Roman"/>
-                <a:ea typeface="Century"/>
-                <a:cs typeface="Times New Roman"/>
-              </a:rPr>
-              <a:t>Gurrala</a:t>
-            </a:r>
-            <a:r>
-              <a:rPr lang="en-US" sz="1800" dirty="0">
-                <a:solidFill>
-                  <a:srgbClr val="000000"/>
-                </a:solidFill>
-                <a:latin typeface="Times New Roman"/>
-                <a:ea typeface="Century"/>
-                <a:cs typeface="Times New Roman"/>
-              </a:rPr>
-              <a:t>, and R. P. </a:t>
-            </a:r>
-            <a:r>
-              <a:rPr lang="en-US" sz="1800" dirty="0" err="1">
-                <a:solidFill>
-                  <a:srgbClr val="000000"/>
-                </a:solidFill>
-                <a:latin typeface="Times New Roman"/>
-                <a:ea typeface="Century"/>
-                <a:cs typeface="Times New Roman"/>
-              </a:rPr>
-              <a:t>Somineni</a:t>
-            </a:r>
-            <a:r>
-              <a:rPr lang="en-US" sz="1800" dirty="0">
-                <a:solidFill>
-                  <a:srgbClr val="000000"/>
-                </a:solidFill>
-                <a:latin typeface="Times New Roman"/>
-                <a:ea typeface="Century"/>
-                <a:cs typeface="Times New Roman"/>
-              </a:rPr>
-              <a:t>, "Semantic Segmentation and Transfer Learning based Disease Classification in Black Gram Plants: BLACK GRAM PLANT LEAF SEGMENTATION AND DISEASE CLASSIFICATION," </a:t>
-            </a:r>
-            <a:r>
-              <a:rPr lang="en-US" sz="1800" i="1" dirty="0">
-                <a:solidFill>
-                  <a:srgbClr val="000000"/>
-                </a:solidFill>
-                <a:latin typeface="Times New Roman"/>
-                <a:ea typeface="Century"/>
-                <a:cs typeface="Times New Roman"/>
-              </a:rPr>
-              <a:t>Journal of Scientific &amp; Industrial Research (JSIR)</a:t>
-            </a:r>
-            <a:r>
-              <a:rPr lang="en-US" sz="1800" dirty="0">
-                <a:solidFill>
-                  <a:srgbClr val="000000"/>
-                </a:solidFill>
-                <a:latin typeface="Times New Roman"/>
-                <a:ea typeface="Century"/>
-                <a:cs typeface="Times New Roman"/>
-              </a:rPr>
-              <a:t>, vol. 84, no. 04, pp. 399–410, 2025.</a:t>
-            </a:r>
-            <a:endParaRPr lang="en-US" sz="1800" dirty="0">
-              <a:latin typeface="Times New Roman"/>
-              <a:ea typeface="Calibri"/>
-              <a:cs typeface="Times New Roman"/>
-            </a:endParaRPr>
-          </a:p>
-          <a:p>
-            <a:pPr marL="342900" marR="0" lvl="0" indent="-342900" algn="just">
-              <a:lnSpc>
-                <a:spcPct val="150000"/>
-              </a:lnSpc>
-              <a:spcBef>
-                <a:spcPts val="5"/>
-              </a:spcBef>
-              <a:spcAft>
-                <a:spcPts val="0"/>
-              </a:spcAft>
-              <a:buFont typeface="+mj-lt"/>
-              <a:buAutoNum type="arabicPeriod"/>
-              <a:tabLst>
-                <a:tab pos="342900" algn="l"/>
-              </a:tabLst>
-              <a:defRPr/>
-            </a:pPr>
-            <a:r>
-              <a:rPr lang="en-US" sz="1800" dirty="0">
-                <a:solidFill>
-                  <a:srgbClr val="000000"/>
-                </a:solidFill>
-                <a:latin typeface="Times New Roman"/>
-                <a:ea typeface="Century"/>
-                <a:cs typeface="Times New Roman"/>
-              </a:rPr>
-              <a:t>R. Mehta, P. Kumar, G. Prem, S. Aggarwal, and R. Kumar, "Leveraging Artificial Intelligence for Disease Diagnosis in Agricultural Crops: A Review," </a:t>
-            </a:r>
-            <a:r>
-              <a:rPr lang="en-US" sz="1800" i="1" dirty="0">
-                <a:solidFill>
-                  <a:srgbClr val="000000"/>
-                </a:solidFill>
-                <a:latin typeface="Times New Roman"/>
-                <a:ea typeface="Century"/>
-                <a:cs typeface="Times New Roman"/>
-              </a:rPr>
-              <a:t>Indian Journal of Agricultural Research</a:t>
-            </a:r>
-            <a:r>
-              <a:rPr lang="en-US" sz="1800" dirty="0">
-                <a:solidFill>
-                  <a:srgbClr val="000000"/>
-                </a:solidFill>
-                <a:latin typeface="Times New Roman"/>
-                <a:ea typeface="Century"/>
-                <a:cs typeface="Times New Roman"/>
-              </a:rPr>
-              <a:t>, vol. 59, no. 5, 2025.</a:t>
-            </a:r>
-            <a:endParaRPr lang="en-US" sz="1800" dirty="0">
-              <a:latin typeface="Times New Roman"/>
-              <a:ea typeface="Calibri"/>
-              <a:cs typeface="Times New Roman"/>
-            </a:endParaRPr>
-          </a:p>
-          <a:p>
-            <a:pPr marL="342900" marR="0" lvl="0" indent="-342900" algn="just">
-              <a:lnSpc>
-                <a:spcPct val="150000"/>
-              </a:lnSpc>
-              <a:spcBef>
-                <a:spcPts val="5"/>
-              </a:spcBef>
-              <a:spcAft>
-                <a:spcPts val="0"/>
-              </a:spcAft>
-              <a:buFont typeface="+mj-lt"/>
-              <a:buAutoNum type="arabicPeriod"/>
-              <a:tabLst>
-                <a:tab pos="342900" algn="l"/>
-              </a:tabLst>
-              <a:defRPr/>
-            </a:pPr>
-            <a:r>
-              <a:rPr lang="en-US" sz="1800" dirty="0">
-                <a:solidFill>
-                  <a:srgbClr val="000000"/>
-                </a:solidFill>
-                <a:latin typeface="Times New Roman"/>
-                <a:ea typeface="Century"/>
-                <a:cs typeface="Times New Roman"/>
-              </a:rPr>
-              <a:t>P. Das et al., "Characterization of Newly Identified Mung Bean [Vigna radiata (L.) </a:t>
-            </a:r>
-            <a:r>
-              <a:rPr lang="en-US" sz="1800" dirty="0" err="1">
-                <a:solidFill>
-                  <a:srgbClr val="000000"/>
-                </a:solidFill>
-                <a:latin typeface="Times New Roman"/>
-                <a:ea typeface="Century"/>
-                <a:cs typeface="Times New Roman"/>
-              </a:rPr>
-              <a:t>Wilczek</a:t>
-            </a:r>
-            <a:r>
-              <a:rPr lang="en-US" sz="1800" dirty="0">
-                <a:solidFill>
-                  <a:srgbClr val="000000"/>
-                </a:solidFill>
-                <a:latin typeface="Times New Roman"/>
-                <a:ea typeface="Century"/>
-                <a:cs typeface="Times New Roman"/>
-              </a:rPr>
-              <a:t>] Landraces for Yellow Mosaic Disease Resistance Using Morphological, Biochemical and Molecular Traits," </a:t>
-            </a:r>
-            <a:r>
-              <a:rPr lang="en-US" sz="1800" i="1" dirty="0">
-                <a:solidFill>
-                  <a:srgbClr val="000000"/>
-                </a:solidFill>
-                <a:latin typeface="Times New Roman"/>
-                <a:ea typeface="Century"/>
-                <a:cs typeface="Times New Roman"/>
-              </a:rPr>
-              <a:t>Plant Molecular Biology Reporter</a:t>
-            </a:r>
-            <a:r>
-              <a:rPr lang="en-US" sz="1800" dirty="0">
-                <a:solidFill>
-                  <a:srgbClr val="000000"/>
-                </a:solidFill>
-                <a:latin typeface="Times New Roman"/>
-                <a:ea typeface="Century"/>
-                <a:cs typeface="Times New Roman"/>
-              </a:rPr>
-              <a:t>, pp. 1–14, 2025.</a:t>
-            </a:r>
-            <a:endParaRPr lang="en-US" sz="1800" dirty="0">
-              <a:latin typeface="Times New Roman"/>
-              <a:ea typeface="Calibri"/>
-              <a:cs typeface="Times New Roman"/>
-            </a:endParaRPr>
-          </a:p>
-          <a:p>
-            <a:pPr marL="342900" marR="0" lvl="0" indent="-342900" algn="just">
-              <a:lnSpc>
-                <a:spcPct val="150000"/>
-              </a:lnSpc>
-              <a:spcBef>
-                <a:spcPts val="5"/>
-              </a:spcBef>
-              <a:spcAft>
-                <a:spcPts val="0"/>
-              </a:spcAft>
-              <a:buFont typeface="+mj-lt"/>
-              <a:buAutoNum type="arabicPeriod"/>
-              <a:tabLst>
-                <a:tab pos="342900" algn="l"/>
-              </a:tabLst>
-              <a:defRPr/>
-            </a:pPr>
-            <a:r>
-              <a:rPr lang="en-US" sz="1800" dirty="0">
-                <a:solidFill>
-                  <a:srgbClr val="000000"/>
-                </a:solidFill>
-                <a:latin typeface="Times New Roman"/>
-                <a:ea typeface="Century"/>
-                <a:cs typeface="Times New Roman"/>
-              </a:rPr>
-              <a:t>G. Sangar and V. Rajasekar, "An optimized attention-based deep learning model for black gram leaf disease classification," </a:t>
-            </a:r>
-            <a:r>
-              <a:rPr lang="en-US" sz="1800" i="1" dirty="0">
-                <a:solidFill>
-                  <a:srgbClr val="000000"/>
-                </a:solidFill>
-                <a:latin typeface="Times New Roman"/>
-                <a:ea typeface="Century"/>
-                <a:cs typeface="Times New Roman"/>
-              </a:rPr>
-              <a:t>Journal of Theoretical and Applied Information Technology</a:t>
-            </a:r>
-            <a:r>
-              <a:rPr lang="en-US" sz="1800" dirty="0">
-                <a:solidFill>
-                  <a:srgbClr val="000000"/>
-                </a:solidFill>
-                <a:latin typeface="Times New Roman"/>
-                <a:ea typeface="Century"/>
-                <a:cs typeface="Times New Roman"/>
-              </a:rPr>
-              <a:t>, vol. 103, no. 4, 2025.</a:t>
-            </a:r>
-            <a:endParaRPr lang="en-US" sz="1800" dirty="0">
-              <a:latin typeface="Times New Roman"/>
-              <a:ea typeface="Calibri"/>
-              <a:cs typeface="Times New Roman"/>
-            </a:endParaRPr>
-          </a:p>
-        </p:txBody>
-      </p:sp>
-    </p:spTree>
-    <p:extLst>
-      <p:ext uri="{BB962C8B-B14F-4D97-AF65-F5344CB8AC3E}">
-        <p14:creationId xmlns:p14="http://schemas.microsoft.com/office/powerpoint/2010/main" val="1905469527"/>
       </p:ext>
     </p:extLst>
   </p:cSld>
@@ -10871,6 +10353,715 @@
   <p:cSld>
     <p:spTree>
       <p:nvGrpSpPr>
+        <p:cNvPr id="1" name="">
+          <a:extLst>
+            <a:ext uri="{FF2B5EF4-FFF2-40B4-BE49-F238E27FC236}">
+              <a16:creationId xmlns:a16="http://schemas.microsoft.com/office/drawing/2014/main" id="{A59BAAE9-3B4C-FCEC-50FC-12FB4062A64C}"/>
+            </a:ext>
+          </a:extLst>
+        </p:cNvPr>
+        <p:cNvGrpSpPr/>
+        <p:nvPr/>
+      </p:nvGrpSpPr>
+      <p:grpSpPr>
+        <a:xfrm>
+          <a:off x="0" y="0"/>
+          <a:ext cx="0" cy="0"/>
+          <a:chOff x="0" y="0"/>
+          <a:chExt cx="0" cy="0"/>
+        </a:xfrm>
+      </p:grpSpPr>
+      <p:sp>
+        <p:nvSpPr>
+          <p:cNvPr id="2" name="Title 1">
+            <a:extLst>
+              <a:ext uri="{FF2B5EF4-FFF2-40B4-BE49-F238E27FC236}">
+                <a16:creationId xmlns:a16="http://schemas.microsoft.com/office/drawing/2014/main" id="{9801CA16-AE0D-D369-FE42-59C7313CB16E}"/>
+              </a:ext>
+            </a:extLst>
+          </p:cNvPr>
+          <p:cNvSpPr>
+            <a:spLocks noGrp="1"/>
+          </p:cNvSpPr>
+          <p:nvPr>
+            <p:ph type="title"/>
+          </p:nvPr>
+        </p:nvSpPr>
+        <p:spPr>
+          <a:xfrm>
+            <a:off x="1981200" y="274638"/>
+            <a:ext cx="8229600" cy="868362"/>
+          </a:xfrm>
+        </p:spPr>
+        <p:txBody>
+          <a:bodyPr/>
+          <a:lstStyle/>
+          <a:p>
+            <a:r>
+              <a:rPr lang="en-US" dirty="0">
+                <a:solidFill>
+                  <a:srgbClr val="7030A0"/>
+                </a:solidFill>
+                <a:latin typeface="Times New Roman" pitchFamily="18" charset="0"/>
+                <a:cs typeface="Times New Roman" pitchFamily="18" charset="0"/>
+              </a:rPr>
+              <a:t>References</a:t>
+            </a:r>
+            <a:endParaRPr lang="en-US" dirty="0">
+              <a:solidFill>
+                <a:srgbClr val="7030A0"/>
+              </a:solidFill>
+            </a:endParaRPr>
+          </a:p>
+        </p:txBody>
+      </p:sp>
+      <p:sp>
+        <p:nvSpPr>
+          <p:cNvPr id="4" name="Slide Number Placeholder 3">
+            <a:extLst>
+              <a:ext uri="{FF2B5EF4-FFF2-40B4-BE49-F238E27FC236}">
+                <a16:creationId xmlns:a16="http://schemas.microsoft.com/office/drawing/2014/main" id="{F97097F1-FADA-324C-E90E-73FFCAEF9034}"/>
+              </a:ext>
+            </a:extLst>
+          </p:cNvPr>
+          <p:cNvSpPr>
+            <a:spLocks noGrp="1"/>
+          </p:cNvSpPr>
+          <p:nvPr>
+            <p:ph type="sldNum" sz="quarter" idx="16"/>
+          </p:nvPr>
+        </p:nvSpPr>
+        <p:spPr>
+          <a:xfrm>
+            <a:off x="9347200" y="5959475"/>
+            <a:ext cx="2844800" cy="365125"/>
+          </a:xfrm>
+        </p:spPr>
+        <p:txBody>
+          <a:bodyPr/>
+          <a:lstStyle/>
+          <a:p>
+            <a:pPr>
+              <a:defRPr/>
+            </a:pPr>
+            <a:fld id="{4CD333A3-7515-47B8-9EDC-EE0892D9C861}" type="slidenum">
+              <a:rPr lang="en-US" smtClean="0"/>
+              <a:pPr>
+                <a:defRPr/>
+              </a:pPr>
+              <a:t>20</a:t>
+            </a:fld>
+            <a:endParaRPr lang="en-US" dirty="0"/>
+          </a:p>
+        </p:txBody>
+      </p:sp>
+      <p:sp>
+        <p:nvSpPr>
+          <p:cNvPr id="5" name="TextBox 4">
+            <a:extLst>
+              <a:ext uri="{FF2B5EF4-FFF2-40B4-BE49-F238E27FC236}">
+                <a16:creationId xmlns:a16="http://schemas.microsoft.com/office/drawing/2014/main" id="{908FB2A1-531C-6EF4-8574-EB5912211BF6}"/>
+              </a:ext>
+            </a:extLst>
+          </p:cNvPr>
+          <p:cNvSpPr txBox="1"/>
+          <p:nvPr/>
+        </p:nvSpPr>
+        <p:spPr>
+          <a:xfrm>
+            <a:off x="8915400" y="6412468"/>
+            <a:ext cx="3276600" cy="369332"/>
+          </a:xfrm>
+          <a:prstGeom prst="rect">
+            <a:avLst/>
+          </a:prstGeom>
+          <a:solidFill>
+            <a:srgbClr val="4F81BD"/>
+          </a:solidFill>
+        </p:spPr>
+        <p:txBody>
+          <a:bodyPr wrap="square" rtlCol="0">
+            <a:spAutoFit/>
+          </a:bodyPr>
+          <a:lstStyle/>
+          <a:p>
+            <a:pPr algn="r"/>
+            <a:r>
+              <a:rPr lang="en-US" b="1" dirty="0">
+                <a:solidFill>
+                  <a:schemeClr val="bg1"/>
+                </a:solidFill>
+              </a:rPr>
+              <a:t>B.Sc. Final-Defense</a:t>
+            </a:r>
+          </a:p>
+        </p:txBody>
+      </p:sp>
+      <p:sp>
+        <p:nvSpPr>
+          <p:cNvPr id="3" name="Content Placeholder 2">
+            <a:extLst>
+              <a:ext uri="{FF2B5EF4-FFF2-40B4-BE49-F238E27FC236}">
+                <a16:creationId xmlns:a16="http://schemas.microsoft.com/office/drawing/2014/main" id="{77D4754E-D10E-F191-5198-2CFE71EB669C}"/>
+              </a:ext>
+            </a:extLst>
+          </p:cNvPr>
+          <p:cNvSpPr>
+            <a:spLocks noGrp="1"/>
+          </p:cNvSpPr>
+          <p:nvPr>
+            <p:ph sz="quarter" idx="13"/>
+          </p:nvPr>
+        </p:nvSpPr>
+        <p:spPr bwMode="auto">
+          <a:xfrm>
+            <a:off x="533400" y="1676400"/>
+            <a:ext cx="11049000" cy="3962400"/>
+          </a:xfrm>
+        </p:spPr>
+        <p:txBody>
+          <a:bodyPr vertOverflow="overflow" horzOverflow="overflow" vert="horz" wrap="square" lIns="91440" tIns="45720" rIns="91440" bIns="45720" numCol="1" spcCol="0" rtlCol="0" fromWordArt="0" anchor="t" anchorCtr="0" forceAA="0" compatLnSpc="0">
+            <a:normAutofit fontScale="80000" lnSpcReduction="10000"/>
+          </a:bodyPr>
+          <a:lstStyle/>
+          <a:p>
+            <a:pPr marL="342900" marR="0" lvl="0" indent="-342900" algn="just">
+              <a:lnSpc>
+                <a:spcPct val="150000"/>
+              </a:lnSpc>
+              <a:spcBef>
+                <a:spcPts val="5"/>
+              </a:spcBef>
+              <a:spcAft>
+                <a:spcPts val="0"/>
+              </a:spcAft>
+              <a:buFont typeface="+mj-lt"/>
+              <a:buAutoNum type="arabicPeriod"/>
+              <a:tabLst>
+                <a:tab pos="342900" algn="l"/>
+              </a:tabLst>
+              <a:defRPr/>
+            </a:pPr>
+            <a:r>
+              <a:rPr lang="en-US" sz="1800" dirty="0">
+                <a:solidFill>
+                  <a:srgbClr val="000000"/>
+                </a:solidFill>
+                <a:latin typeface="Times New Roman"/>
+                <a:ea typeface="Century"/>
+                <a:cs typeface="Times New Roman"/>
+              </a:rPr>
+              <a:t>N. </a:t>
+            </a:r>
+            <a:r>
+              <a:rPr lang="en-US" sz="1800" dirty="0" err="1">
+                <a:solidFill>
+                  <a:srgbClr val="000000"/>
+                </a:solidFill>
+                <a:latin typeface="Times New Roman"/>
+                <a:ea typeface="Century"/>
+                <a:cs typeface="Times New Roman"/>
+              </a:rPr>
+              <a:t>Hajare</a:t>
+            </a:r>
+            <a:r>
+              <a:rPr lang="en-US" sz="1800" dirty="0">
+                <a:solidFill>
+                  <a:srgbClr val="000000"/>
+                </a:solidFill>
+                <a:latin typeface="Times New Roman"/>
+                <a:ea typeface="Century"/>
+                <a:cs typeface="Times New Roman"/>
+              </a:rPr>
+              <a:t> and A. S. </a:t>
+            </a:r>
+            <a:r>
+              <a:rPr lang="en-US" sz="1800" dirty="0" err="1">
+                <a:solidFill>
+                  <a:srgbClr val="000000"/>
+                </a:solidFill>
+                <a:latin typeface="Times New Roman"/>
+                <a:ea typeface="Century"/>
+                <a:cs typeface="Times New Roman"/>
+              </a:rPr>
+              <a:t>Rajawat</a:t>
+            </a:r>
+            <a:r>
+              <a:rPr lang="en-US" sz="1800" dirty="0">
+                <a:solidFill>
+                  <a:srgbClr val="000000"/>
+                </a:solidFill>
+                <a:latin typeface="Times New Roman"/>
+                <a:ea typeface="Century"/>
+                <a:cs typeface="Times New Roman"/>
+              </a:rPr>
+              <a:t>, "Black gram disease classification via deep ensemble model with optimal training," </a:t>
+            </a:r>
+            <a:r>
+              <a:rPr lang="en-US" sz="1800" i="1" dirty="0">
+                <a:solidFill>
+                  <a:srgbClr val="000000"/>
+                </a:solidFill>
+                <a:latin typeface="Times New Roman"/>
+                <a:ea typeface="Century"/>
+                <a:cs typeface="Times New Roman"/>
+              </a:rPr>
+              <a:t>International Journal of Image and Graphics</a:t>
+            </a:r>
+            <a:r>
+              <a:rPr lang="en-US" sz="1800" dirty="0">
+                <a:solidFill>
+                  <a:srgbClr val="000000"/>
+                </a:solidFill>
+                <a:latin typeface="Times New Roman"/>
+                <a:ea typeface="Century"/>
+                <a:cs typeface="Times New Roman"/>
+              </a:rPr>
+              <a:t>, vol. 25, no. 04, p. 2550033, 2025.</a:t>
+            </a:r>
+            <a:endParaRPr lang="en-US" sz="1800" dirty="0">
+              <a:latin typeface="Times New Roman"/>
+              <a:ea typeface="Calibri"/>
+              <a:cs typeface="Times New Roman"/>
+            </a:endParaRPr>
+          </a:p>
+          <a:p>
+            <a:pPr marL="342900" marR="0" lvl="0" indent="-342900" algn="just">
+              <a:lnSpc>
+                <a:spcPct val="150000"/>
+              </a:lnSpc>
+              <a:spcBef>
+                <a:spcPts val="5"/>
+              </a:spcBef>
+              <a:spcAft>
+                <a:spcPts val="0"/>
+              </a:spcAft>
+              <a:buFont typeface="+mj-lt"/>
+              <a:buAutoNum type="arabicPeriod"/>
+              <a:tabLst>
+                <a:tab pos="342900" algn="l"/>
+              </a:tabLst>
+              <a:defRPr/>
+            </a:pPr>
+            <a:r>
+              <a:rPr lang="en-US" sz="1800" dirty="0">
+                <a:solidFill>
+                  <a:srgbClr val="000000"/>
+                </a:solidFill>
+                <a:latin typeface="Times New Roman"/>
+                <a:ea typeface="Century"/>
+                <a:cs typeface="Times New Roman"/>
+              </a:rPr>
+              <a:t>N. S. Jyothi and R. S. Prasad, "</a:t>
+            </a:r>
+            <a:r>
+              <a:rPr lang="en-US" sz="1800" dirty="0" err="1">
+                <a:solidFill>
+                  <a:srgbClr val="000000"/>
+                </a:solidFill>
+                <a:latin typeface="Times New Roman"/>
+                <a:ea typeface="Century"/>
+                <a:cs typeface="Times New Roman"/>
+              </a:rPr>
+              <a:t>Cuscuta</a:t>
+            </a:r>
+            <a:r>
+              <a:rPr lang="en-US" sz="1800" dirty="0">
+                <a:solidFill>
+                  <a:srgbClr val="000000"/>
+                </a:solidFill>
+                <a:latin typeface="Times New Roman"/>
+                <a:ea typeface="Century"/>
+                <a:cs typeface="Times New Roman"/>
+              </a:rPr>
+              <a:t> detection and classification of </a:t>
+            </a:r>
+            <a:r>
+              <a:rPr lang="en-US" sz="1800" dirty="0" err="1">
+                <a:solidFill>
+                  <a:srgbClr val="000000"/>
+                </a:solidFill>
+                <a:latin typeface="Times New Roman"/>
+                <a:ea typeface="Century"/>
+                <a:cs typeface="Times New Roman"/>
+              </a:rPr>
+              <a:t>blackgram</a:t>
+            </a:r>
+            <a:r>
+              <a:rPr lang="en-US" sz="1800" dirty="0">
+                <a:solidFill>
+                  <a:srgbClr val="000000"/>
+                </a:solidFill>
+                <a:latin typeface="Times New Roman"/>
+                <a:ea typeface="Century"/>
+                <a:cs typeface="Times New Roman"/>
+              </a:rPr>
+              <a:t> plant leaf diseases using deep-transformation algorithm," in </a:t>
+            </a:r>
+            <a:r>
+              <a:rPr lang="en-US" sz="1800" i="1" dirty="0">
+                <a:solidFill>
+                  <a:srgbClr val="000000"/>
+                </a:solidFill>
+                <a:latin typeface="Times New Roman"/>
+                <a:ea typeface="Century"/>
+                <a:cs typeface="Times New Roman"/>
+              </a:rPr>
+              <a:t>2025 International Conference on Multi-Agent Systems for Collaborative Intelligence (ICMSCI)</a:t>
+            </a:r>
+            <a:r>
+              <a:rPr lang="en-US" sz="1800" dirty="0">
+                <a:solidFill>
+                  <a:srgbClr val="000000"/>
+                </a:solidFill>
+                <a:latin typeface="Times New Roman"/>
+                <a:ea typeface="Century"/>
+                <a:cs typeface="Times New Roman"/>
+              </a:rPr>
+              <a:t>, Jan. 2025, pp. 1854–1858.</a:t>
+            </a:r>
+            <a:endParaRPr lang="en-US" sz="1800" dirty="0">
+              <a:latin typeface="Times New Roman"/>
+              <a:ea typeface="Calibri"/>
+              <a:cs typeface="Times New Roman"/>
+            </a:endParaRPr>
+          </a:p>
+          <a:p>
+            <a:pPr marL="342900" marR="0" lvl="0" indent="-342900" algn="just">
+              <a:lnSpc>
+                <a:spcPct val="150000"/>
+              </a:lnSpc>
+              <a:spcBef>
+                <a:spcPts val="5"/>
+              </a:spcBef>
+              <a:spcAft>
+                <a:spcPts val="0"/>
+              </a:spcAft>
+              <a:buFont typeface="+mj-lt"/>
+              <a:buAutoNum type="arabicPeriod"/>
+              <a:tabLst>
+                <a:tab pos="342900" algn="l"/>
+              </a:tabLst>
+              <a:defRPr/>
+            </a:pPr>
+            <a:r>
+              <a:rPr lang="en-US" sz="1800" dirty="0">
+                <a:solidFill>
+                  <a:srgbClr val="000000"/>
+                </a:solidFill>
+                <a:latin typeface="Times New Roman"/>
+                <a:ea typeface="Century"/>
+                <a:cs typeface="Times New Roman"/>
+              </a:rPr>
+              <a:t>S. </a:t>
+            </a:r>
+            <a:r>
+              <a:rPr lang="en-US" sz="1800" dirty="0" err="1">
+                <a:solidFill>
+                  <a:srgbClr val="000000"/>
+                </a:solidFill>
+                <a:latin typeface="Times New Roman"/>
+                <a:ea typeface="Century"/>
+                <a:cs typeface="Times New Roman"/>
+              </a:rPr>
+              <a:t>Talasila</a:t>
+            </a:r>
+            <a:r>
+              <a:rPr lang="en-US" sz="1800" dirty="0">
+                <a:solidFill>
+                  <a:srgbClr val="000000"/>
+                </a:solidFill>
+                <a:latin typeface="Times New Roman"/>
+                <a:ea typeface="Century"/>
+                <a:cs typeface="Times New Roman"/>
+              </a:rPr>
+              <a:t>, V. K. </a:t>
+            </a:r>
+            <a:r>
+              <a:rPr lang="en-US" sz="1800" dirty="0" err="1">
+                <a:solidFill>
+                  <a:srgbClr val="000000"/>
+                </a:solidFill>
+                <a:latin typeface="Times New Roman"/>
+                <a:ea typeface="Century"/>
+                <a:cs typeface="Times New Roman"/>
+              </a:rPr>
+              <a:t>Gurrala</a:t>
+            </a:r>
+            <a:r>
+              <a:rPr lang="en-US" sz="1800" dirty="0">
+                <a:solidFill>
+                  <a:srgbClr val="000000"/>
+                </a:solidFill>
+                <a:latin typeface="Times New Roman"/>
+                <a:ea typeface="Century"/>
+                <a:cs typeface="Times New Roman"/>
+              </a:rPr>
+              <a:t>, and R. P. </a:t>
+            </a:r>
+            <a:r>
+              <a:rPr lang="en-US" sz="1800" dirty="0" err="1">
+                <a:solidFill>
+                  <a:srgbClr val="000000"/>
+                </a:solidFill>
+                <a:latin typeface="Times New Roman"/>
+                <a:ea typeface="Century"/>
+                <a:cs typeface="Times New Roman"/>
+              </a:rPr>
+              <a:t>Somineni</a:t>
+            </a:r>
+            <a:r>
+              <a:rPr lang="en-US" sz="1800" dirty="0">
+                <a:solidFill>
+                  <a:srgbClr val="000000"/>
+                </a:solidFill>
+                <a:latin typeface="Times New Roman"/>
+                <a:ea typeface="Century"/>
+                <a:cs typeface="Times New Roman"/>
+              </a:rPr>
+              <a:t>, "Semantic Segmentation and Transfer Learning based Disease Classification in Black Gram Plants: BLACK GRAM PLANT LEAF SEGMENTATION AND DISEASE CLASSIFICATION," </a:t>
+            </a:r>
+            <a:r>
+              <a:rPr lang="en-US" sz="1800" i="1" dirty="0">
+                <a:solidFill>
+                  <a:srgbClr val="000000"/>
+                </a:solidFill>
+                <a:latin typeface="Times New Roman"/>
+                <a:ea typeface="Century"/>
+                <a:cs typeface="Times New Roman"/>
+              </a:rPr>
+              <a:t>Journal of Scientific &amp; Industrial Research (JSIR)</a:t>
+            </a:r>
+            <a:r>
+              <a:rPr lang="en-US" sz="1800" dirty="0">
+                <a:solidFill>
+                  <a:srgbClr val="000000"/>
+                </a:solidFill>
+                <a:latin typeface="Times New Roman"/>
+                <a:ea typeface="Century"/>
+                <a:cs typeface="Times New Roman"/>
+              </a:rPr>
+              <a:t>, vol. 84, no. 04, pp. 399–410, 2025.</a:t>
+            </a:r>
+            <a:endParaRPr lang="en-US" sz="1800" dirty="0">
+              <a:latin typeface="Times New Roman"/>
+              <a:ea typeface="Calibri"/>
+              <a:cs typeface="Times New Roman"/>
+            </a:endParaRPr>
+          </a:p>
+          <a:p>
+            <a:pPr marL="342900" marR="0" lvl="0" indent="-342900" algn="just">
+              <a:lnSpc>
+                <a:spcPct val="150000"/>
+              </a:lnSpc>
+              <a:spcBef>
+                <a:spcPts val="5"/>
+              </a:spcBef>
+              <a:spcAft>
+                <a:spcPts val="0"/>
+              </a:spcAft>
+              <a:buFont typeface="+mj-lt"/>
+              <a:buAutoNum type="arabicPeriod"/>
+              <a:tabLst>
+                <a:tab pos="342900" algn="l"/>
+              </a:tabLst>
+              <a:defRPr/>
+            </a:pPr>
+            <a:r>
+              <a:rPr lang="en-US" sz="1800" dirty="0">
+                <a:solidFill>
+                  <a:srgbClr val="000000"/>
+                </a:solidFill>
+                <a:latin typeface="Times New Roman"/>
+                <a:ea typeface="Century"/>
+                <a:cs typeface="Times New Roman"/>
+              </a:rPr>
+              <a:t>R. Mehta, P. Kumar, G. Prem, S. Aggarwal, and R. Kumar, "Leveraging Artificial Intelligence for Disease Diagnosis in Agricultural Crops: A Review," </a:t>
+            </a:r>
+            <a:r>
+              <a:rPr lang="en-US" sz="1800" i="1" dirty="0">
+                <a:solidFill>
+                  <a:srgbClr val="000000"/>
+                </a:solidFill>
+                <a:latin typeface="Times New Roman"/>
+                <a:ea typeface="Century"/>
+                <a:cs typeface="Times New Roman"/>
+              </a:rPr>
+              <a:t>Indian Journal of Agricultural Research</a:t>
+            </a:r>
+            <a:r>
+              <a:rPr lang="en-US" sz="1800" dirty="0">
+                <a:solidFill>
+                  <a:srgbClr val="000000"/>
+                </a:solidFill>
+                <a:latin typeface="Times New Roman"/>
+                <a:ea typeface="Century"/>
+                <a:cs typeface="Times New Roman"/>
+              </a:rPr>
+              <a:t>, vol. 59, no. 5, 2025.</a:t>
+            </a:r>
+            <a:endParaRPr lang="en-US" sz="1800" dirty="0">
+              <a:latin typeface="Times New Roman"/>
+              <a:ea typeface="Calibri"/>
+              <a:cs typeface="Times New Roman"/>
+            </a:endParaRPr>
+          </a:p>
+          <a:p>
+            <a:pPr marL="342900" marR="0" lvl="0" indent="-342900" algn="just">
+              <a:lnSpc>
+                <a:spcPct val="150000"/>
+              </a:lnSpc>
+              <a:spcBef>
+                <a:spcPts val="5"/>
+              </a:spcBef>
+              <a:spcAft>
+                <a:spcPts val="0"/>
+              </a:spcAft>
+              <a:buFont typeface="+mj-lt"/>
+              <a:buAutoNum type="arabicPeriod"/>
+              <a:tabLst>
+                <a:tab pos="342900" algn="l"/>
+              </a:tabLst>
+              <a:defRPr/>
+            </a:pPr>
+            <a:r>
+              <a:rPr lang="en-US" sz="1800" dirty="0">
+                <a:solidFill>
+                  <a:srgbClr val="000000"/>
+                </a:solidFill>
+                <a:latin typeface="Times New Roman"/>
+                <a:ea typeface="Century"/>
+                <a:cs typeface="Times New Roman"/>
+              </a:rPr>
+              <a:t>P. Das et al., "Characterization of Newly Identified Mung Bean [Vigna radiata (L.) </a:t>
+            </a:r>
+            <a:r>
+              <a:rPr lang="en-US" sz="1800" dirty="0" err="1">
+                <a:solidFill>
+                  <a:srgbClr val="000000"/>
+                </a:solidFill>
+                <a:latin typeface="Times New Roman"/>
+                <a:ea typeface="Century"/>
+                <a:cs typeface="Times New Roman"/>
+              </a:rPr>
+              <a:t>Wilczek</a:t>
+            </a:r>
+            <a:r>
+              <a:rPr lang="en-US" sz="1800" dirty="0">
+                <a:solidFill>
+                  <a:srgbClr val="000000"/>
+                </a:solidFill>
+                <a:latin typeface="Times New Roman"/>
+                <a:ea typeface="Century"/>
+                <a:cs typeface="Times New Roman"/>
+              </a:rPr>
+              <a:t>] Landraces for Yellow Mosaic Disease Resistance Using Morphological, Biochemical and Molecular Traits," </a:t>
+            </a:r>
+            <a:r>
+              <a:rPr lang="en-US" sz="1800" i="1" dirty="0">
+                <a:solidFill>
+                  <a:srgbClr val="000000"/>
+                </a:solidFill>
+                <a:latin typeface="Times New Roman"/>
+                <a:ea typeface="Century"/>
+                <a:cs typeface="Times New Roman"/>
+              </a:rPr>
+              <a:t>Plant Molecular Biology Reporter</a:t>
+            </a:r>
+            <a:r>
+              <a:rPr lang="en-US" sz="1800" dirty="0">
+                <a:solidFill>
+                  <a:srgbClr val="000000"/>
+                </a:solidFill>
+                <a:latin typeface="Times New Roman"/>
+                <a:ea typeface="Century"/>
+                <a:cs typeface="Times New Roman"/>
+              </a:rPr>
+              <a:t>, pp. 1–14, 2025.</a:t>
+            </a:r>
+            <a:endParaRPr lang="en-US" sz="1800" dirty="0">
+              <a:latin typeface="Times New Roman"/>
+              <a:ea typeface="Calibri"/>
+              <a:cs typeface="Times New Roman"/>
+            </a:endParaRPr>
+          </a:p>
+          <a:p>
+            <a:pPr marL="342900" marR="0" lvl="0" indent="-342900" algn="just">
+              <a:lnSpc>
+                <a:spcPct val="150000"/>
+              </a:lnSpc>
+              <a:spcBef>
+                <a:spcPts val="5"/>
+              </a:spcBef>
+              <a:spcAft>
+                <a:spcPts val="0"/>
+              </a:spcAft>
+              <a:buFont typeface="+mj-lt"/>
+              <a:buAutoNum type="arabicPeriod"/>
+              <a:tabLst>
+                <a:tab pos="342900" algn="l"/>
+              </a:tabLst>
+              <a:defRPr/>
+            </a:pPr>
+            <a:r>
+              <a:rPr lang="en-US" sz="1800" dirty="0">
+                <a:solidFill>
+                  <a:srgbClr val="000000"/>
+                </a:solidFill>
+                <a:latin typeface="Times New Roman"/>
+                <a:ea typeface="Century"/>
+                <a:cs typeface="Times New Roman"/>
+              </a:rPr>
+              <a:t>G. Sangar and V. Rajasekar, "An optimized attention-based deep learning model for black gram leaf disease classification," </a:t>
+            </a:r>
+            <a:r>
+              <a:rPr lang="en-US" sz="1800" i="1" dirty="0">
+                <a:solidFill>
+                  <a:srgbClr val="000000"/>
+                </a:solidFill>
+                <a:latin typeface="Times New Roman"/>
+                <a:ea typeface="Century"/>
+                <a:cs typeface="Times New Roman"/>
+              </a:rPr>
+              <a:t>Journal of Theoretical and Applied Information Technology</a:t>
+            </a:r>
+            <a:r>
+              <a:rPr lang="en-US" sz="1800" dirty="0">
+                <a:solidFill>
+                  <a:srgbClr val="000000"/>
+                </a:solidFill>
+                <a:latin typeface="Times New Roman"/>
+                <a:ea typeface="Century"/>
+                <a:cs typeface="Times New Roman"/>
+              </a:rPr>
+              <a:t>, vol. 103, no. 4, 2025.</a:t>
+            </a:r>
+            <a:endParaRPr lang="en-US" sz="1800" dirty="0">
+              <a:latin typeface="Times New Roman"/>
+              <a:ea typeface="Calibri"/>
+              <a:cs typeface="Times New Roman"/>
+            </a:endParaRPr>
+          </a:p>
+        </p:txBody>
+      </p:sp>
+    </p:spTree>
+    <p:extLst>
+      <p:ext uri="{BB962C8B-B14F-4D97-AF65-F5344CB8AC3E}">
+        <p14:creationId xmlns:p14="http://schemas.microsoft.com/office/powerpoint/2010/main" val="1905469527"/>
+      </p:ext>
+    </p:extLst>
+  </p:cSld>
+  <p:clrMapOvr>
+    <a:masterClrMapping/>
+  </p:clrMapOvr>
+</p:sld>
+</file>
+
+<file path=ppt/slides/slide21.xml><?xml version="1.0" encoding="utf-8"?>
+<p:sld xmlns:a="http://schemas.openxmlformats.org/drawingml/2006/main" xmlns:r="http://schemas.openxmlformats.org/officeDocument/2006/relationships" xmlns:p="http://schemas.openxmlformats.org/presentationml/2006/main">
+  <p:cSld>
+    <p:spTree>
+      <p:nvGrpSpPr>
         <p:cNvPr id="1" name=""/>
         <p:cNvGrpSpPr/>
         <p:nvPr/>
@@ -10996,7 +11187,7 @@
               <a:pPr>
                 <a:defRPr/>
               </a:pPr>
-              <a:t>20</a:t>
+              <a:t>21</a:t>
             </a:fld>
             <a:endParaRPr lang="en-US" dirty="0"/>
           </a:p>
